--- a/output/wordlabs-rational-3day.pptx
+++ b/output/wordlabs-rational-3day.pptx
@@ -18182,118 +18182,343 @@
                 <a:ea typeface="Calibri" pitchFamily="34" charset="-122"/>
                 <a:cs typeface="Calibri" pitchFamily="34" charset="-120"/>
               </a:rPr>
-              <a:t> clouds good judgement, so we must always think </a:t>
-            </a:r>
+              <a:t>, not logic, was driving the debate about the new school rules.</a:t>
+            </a:r>
+            <a:endParaRPr lang="en-US" sz="1800" dirty="0"/>
+          </a:p>
+        </p:txBody>
+      </p:sp>
+      <p:sp>
+        <p:nvSpPr>
+          <p:cNvPr id="13" name="Shape 11"/>
+          <p:cNvSpPr/>
+          <p:nvPr/>
+        </p:nvSpPr>
+        <p:spPr>
+          <a:xfrm>
+            <a:off x="365760" y="2852928"/>
+            <a:ext cx="8412480" cy="475488"/>
+          </a:xfrm>
+          <a:prstGeom prst="rect">
+            <a:avLst>
+              <a:gd name="adj" fmla="val 15385"/>
+            </a:avLst>
+          </a:prstGeom>
+          <a:solidFill>
+            <a:srgbClr val="CCFBF1"/>
+          </a:solidFill>
+          <a:ln w="12700">
+            <a:solidFill>
+              <a:srgbClr val="0D9488"/>
+            </a:solidFill>
+            <a:prstDash val="solid"/>
+          </a:ln>
+        </p:spPr>
+      </p:sp>
+      <p:sp>
+        <p:nvSpPr>
+          <p:cNvPr id="14" name="Text 12"/>
+          <p:cNvSpPr/>
+          <p:nvPr/>
+        </p:nvSpPr>
+        <p:spPr>
+          <a:xfrm>
+            <a:off x="502920" y="2852928"/>
+            <a:ext cx="8229600" cy="475488"/>
+          </a:xfrm>
+          <a:prstGeom prst="rect">
+            <a:avLst/>
+          </a:prstGeom>
+          <a:noFill/>
+          <a:ln/>
+        </p:spPr>
+        <p:txBody>
+          <a:bodyPr wrap="square" rtlCol="0" anchor="ctr"/>
+          <a:lstStyle/>
+          <a:p>
             <a:pPr algn="l" indent="0" marL="0">
               <a:buNone/>
             </a:pPr>
             <a:r>
-              <a:rPr lang="en-US" sz="1800" b="1" dirty="0">
-                <a:solidFill>
-                  <a:srgbClr val="0D9488"/>
-                </a:solidFill>
-                <a:highlight>
-                  <a:srgbClr val="CCFBF1"/>
-                </a:highlight>
+              <a:rPr lang="en-US" sz="1200" b="1" dirty="0">
+                <a:solidFill>
+                  <a:srgbClr val="0F766E"/>
+                </a:solidFill>
                 <a:latin typeface="Calibri" pitchFamily="34" charset="0"/>
                 <a:ea typeface="Calibri" pitchFamily="34" charset="-122"/>
                 <a:cs typeface="Calibri" pitchFamily="34" charset="-120"/>
               </a:rPr>
-              <a:t>rationally</a:t>
-            </a:r>
-            <a:pPr algn="l" indent="0" marL="0">
-              <a:buNone/>
-            </a:pPr>
-            <a:r>
-              <a:rPr lang="en-US" sz="1800" dirty="0">
-                <a:solidFill>
-                  <a:srgbClr val="0F172A"/>
+              <a:t>Now rewrite each focus word below with space between letters — leave room for your breakdown.</a:t>
+            </a:r>
+            <a:endParaRPr lang="en-US" sz="1200" dirty="0"/>
+          </a:p>
+        </p:txBody>
+      </p:sp>
+      <p:sp>
+        <p:nvSpPr>
+          <p:cNvPr id="15" name="Shape 13"/>
+          <p:cNvSpPr/>
+          <p:nvPr/>
+        </p:nvSpPr>
+        <p:spPr>
+          <a:xfrm>
+            <a:off x="411480" y="3456432"/>
+            <a:ext cx="2499360" cy="1005840"/>
+          </a:xfrm>
+          <a:prstGeom prst="rect">
+            <a:avLst>
+              <a:gd name="adj" fmla="val 7273"/>
+            </a:avLst>
+          </a:prstGeom>
+          <a:solidFill>
+            <a:srgbClr val="F8FAFC"/>
+          </a:solidFill>
+          <a:ln w="12700">
+            <a:solidFill>
+              <a:srgbClr val="E2E8F0"/>
+            </a:solidFill>
+            <a:prstDash val="solid"/>
+          </a:ln>
+        </p:spPr>
+      </p:sp>
+      <p:sp>
+        <p:nvSpPr>
+          <p:cNvPr id="16" name="Shape 14"/>
+          <p:cNvSpPr/>
+          <p:nvPr/>
+        </p:nvSpPr>
+        <p:spPr>
+          <a:xfrm>
+            <a:off x="411480" y="3977640"/>
+            <a:ext cx="2499360" cy="0"/>
+          </a:xfrm>
+          <a:prstGeom prst="line">
+            <a:avLst/>
+          </a:prstGeom>
+          <a:noFill/>
+          <a:ln w="12700">
+            <a:solidFill>
+              <a:srgbClr val="E2E8F0"/>
+            </a:solidFill>
+            <a:prstDash val="dash"/>
+          </a:ln>
+        </p:spPr>
+      </p:sp>
+      <p:sp>
+        <p:nvSpPr>
+          <p:cNvPr id="17" name="Text 15"/>
+          <p:cNvSpPr/>
+          <p:nvPr/>
+        </p:nvSpPr>
+        <p:spPr>
+          <a:xfrm>
+            <a:off x="411480" y="3456432"/>
+            <a:ext cx="2499360" cy="502920"/>
+          </a:xfrm>
+          <a:prstGeom prst="rect">
+            <a:avLst/>
+          </a:prstGeom>
+          <a:noFill/>
+          <a:ln/>
+        </p:spPr>
+        <p:txBody>
+          <a:bodyPr wrap="square" lIns="0" tIns="0" rIns="0" bIns="0" rtlCol="0" anchor="ctr"/>
+          <a:lstStyle/>
+          <a:p>
+            <a:pPr algn="ctr" indent="0" marL="0">
+              <a:buNone/>
+            </a:pPr>
+            <a:r>
+              <a:rPr lang="en-US" sz="1400" b="1" dirty="0">
+                <a:solidFill>
+                  <a:srgbClr val="0D9488"/>
+                </a:solidFill>
+                <a:latin typeface="Trebuchet MS" pitchFamily="34" charset="0"/>
+                <a:ea typeface="Trebuchet MS" pitchFamily="34" charset="-122"/>
+                <a:cs typeface="Trebuchet MS" pitchFamily="34" charset="-120"/>
+              </a:rPr>
+              <a:t>rationalist</a:t>
+            </a:r>
+            <a:endParaRPr lang="en-US" sz="1400" dirty="0"/>
+          </a:p>
+        </p:txBody>
+      </p:sp>
+      <p:sp>
+        <p:nvSpPr>
+          <p:cNvPr id="18" name="Text 16"/>
+          <p:cNvSpPr/>
+          <p:nvPr/>
+        </p:nvSpPr>
+        <p:spPr>
+          <a:xfrm>
+            <a:off x="411480" y="4005072"/>
+            <a:ext cx="2499360" cy="457200"/>
+          </a:xfrm>
+          <a:prstGeom prst="rect">
+            <a:avLst/>
+          </a:prstGeom>
+          <a:noFill/>
+          <a:ln/>
+        </p:spPr>
+        <p:txBody>
+          <a:bodyPr wrap="square" lIns="0" tIns="0" rIns="0" bIns="0" rtlCol="0" anchor="ctr"/>
+          <a:lstStyle/>
+          <a:p>
+            <a:pPr algn="ctr" indent="0" marL="0">
+              <a:buNone/>
+            </a:pPr>
+            <a:r>
+              <a:rPr lang="en-US" sz="900" i="1" dirty="0">
+                <a:solidFill>
+                  <a:srgbClr val="475569"/>
                 </a:solidFill>
                 <a:latin typeface="Calibri" pitchFamily="34" charset="0"/>
                 <a:ea typeface="Calibri" pitchFamily="34" charset="-122"/>
                 <a:cs typeface="Calibri" pitchFamily="34" charset="-120"/>
               </a:rPr>
-              <a:t> to solve problems.</a:t>
-            </a:r>
-            <a:endParaRPr lang="en-US" sz="1800" dirty="0"/>
-          </a:p>
-        </p:txBody>
-      </p:sp>
-      <p:sp>
-        <p:nvSpPr>
-          <p:cNvPr id="13" name="Shape 11"/>
-          <p:cNvSpPr/>
-          <p:nvPr/>
-        </p:nvSpPr>
-        <p:spPr>
-          <a:xfrm>
-            <a:off x="365760" y="2852928"/>
-            <a:ext cx="8412480" cy="475488"/>
+              <a:t>write your breakdown below</a:t>
+            </a:r>
+            <a:endParaRPr lang="en-US" sz="900" dirty="0"/>
+          </a:p>
+        </p:txBody>
+      </p:sp>
+      <p:sp>
+        <p:nvSpPr>
+          <p:cNvPr id="19" name="Shape 17"/>
+          <p:cNvSpPr/>
+          <p:nvPr/>
+        </p:nvSpPr>
+        <p:spPr>
+          <a:xfrm>
+            <a:off x="3185160" y="3456432"/>
+            <a:ext cx="2499360" cy="1005840"/>
           </a:xfrm>
           <a:prstGeom prst="rect">
             <a:avLst>
-              <a:gd name="adj" fmla="val 15385"/>
+              <a:gd name="adj" fmla="val 7273"/>
             </a:avLst>
           </a:prstGeom>
           <a:solidFill>
-            <a:srgbClr val="CCFBF1"/>
-          </a:solidFill>
-          <a:ln w="12700">
-            <a:solidFill>
-              <a:srgbClr val="0D9488"/>
-            </a:solidFill>
-            <a:prstDash val="solid"/>
-          </a:ln>
-        </p:spPr>
-      </p:sp>
-      <p:sp>
-        <p:nvSpPr>
-          <p:cNvPr id="14" name="Text 12"/>
-          <p:cNvSpPr/>
-          <p:nvPr/>
-        </p:nvSpPr>
-        <p:spPr>
-          <a:xfrm>
-            <a:off x="502920" y="2852928"/>
-            <a:ext cx="8229600" cy="475488"/>
-          </a:xfrm>
-          <a:prstGeom prst="rect">
-            <a:avLst/>
-          </a:prstGeom>
-          <a:noFill/>
-          <a:ln/>
-        </p:spPr>
-        <p:txBody>
-          <a:bodyPr wrap="square" rtlCol="0" anchor="ctr"/>
-          <a:lstStyle/>
-          <a:p>
-            <a:pPr algn="l" indent="0" marL="0">
-              <a:buNone/>
-            </a:pPr>
-            <a:r>
-              <a:rPr lang="en-US" sz="1200" b="1" dirty="0">
-                <a:solidFill>
-                  <a:srgbClr val="0F766E"/>
+            <a:srgbClr val="F8FAFC"/>
+          </a:solidFill>
+          <a:ln w="12700">
+            <a:solidFill>
+              <a:srgbClr val="E2E8F0"/>
+            </a:solidFill>
+            <a:prstDash val="solid"/>
+          </a:ln>
+        </p:spPr>
+      </p:sp>
+      <p:sp>
+        <p:nvSpPr>
+          <p:cNvPr id="20" name="Shape 18"/>
+          <p:cNvSpPr/>
+          <p:nvPr/>
+        </p:nvSpPr>
+        <p:spPr>
+          <a:xfrm>
+            <a:off x="3185160" y="3977640"/>
+            <a:ext cx="2499360" cy="0"/>
+          </a:xfrm>
+          <a:prstGeom prst="line">
+            <a:avLst/>
+          </a:prstGeom>
+          <a:noFill/>
+          <a:ln w="12700">
+            <a:solidFill>
+              <a:srgbClr val="E2E8F0"/>
+            </a:solidFill>
+            <a:prstDash val="dash"/>
+          </a:ln>
+        </p:spPr>
+      </p:sp>
+      <p:sp>
+        <p:nvSpPr>
+          <p:cNvPr id="21" name="Text 19"/>
+          <p:cNvSpPr/>
+          <p:nvPr/>
+        </p:nvSpPr>
+        <p:spPr>
+          <a:xfrm>
+            <a:off x="3185160" y="3456432"/>
+            <a:ext cx="2499360" cy="502920"/>
+          </a:xfrm>
+          <a:prstGeom prst="rect">
+            <a:avLst/>
+          </a:prstGeom>
+          <a:noFill/>
+          <a:ln/>
+        </p:spPr>
+        <p:txBody>
+          <a:bodyPr wrap="square" lIns="0" tIns="0" rIns="0" bIns="0" rtlCol="0" anchor="ctr"/>
+          <a:lstStyle/>
+          <a:p>
+            <a:pPr algn="ctr" indent="0" marL="0">
+              <a:buNone/>
+            </a:pPr>
+            <a:r>
+              <a:rPr lang="en-US" sz="1400" b="1" dirty="0">
+                <a:solidFill>
+                  <a:srgbClr val="0D9488"/>
+                </a:solidFill>
+                <a:latin typeface="Trebuchet MS" pitchFamily="34" charset="0"/>
+                <a:ea typeface="Trebuchet MS" pitchFamily="34" charset="-122"/>
+                <a:cs typeface="Trebuchet MS" pitchFamily="34" charset="-120"/>
+              </a:rPr>
+              <a:t>irrationality</a:t>
+            </a:r>
+            <a:endParaRPr lang="en-US" sz="1400" dirty="0"/>
+          </a:p>
+        </p:txBody>
+      </p:sp>
+      <p:sp>
+        <p:nvSpPr>
+          <p:cNvPr id="22" name="Text 20"/>
+          <p:cNvSpPr/>
+          <p:nvPr/>
+        </p:nvSpPr>
+        <p:spPr>
+          <a:xfrm>
+            <a:off x="3185160" y="4005072"/>
+            <a:ext cx="2499360" cy="457200"/>
+          </a:xfrm>
+          <a:prstGeom prst="rect">
+            <a:avLst/>
+          </a:prstGeom>
+          <a:noFill/>
+          <a:ln/>
+        </p:spPr>
+        <p:txBody>
+          <a:bodyPr wrap="square" lIns="0" tIns="0" rIns="0" bIns="0" rtlCol="0" anchor="ctr"/>
+          <a:lstStyle/>
+          <a:p>
+            <a:pPr algn="ctr" indent="0" marL="0">
+              <a:buNone/>
+            </a:pPr>
+            <a:r>
+              <a:rPr lang="en-US" sz="900" i="1" dirty="0">
+                <a:solidFill>
+                  <a:srgbClr val="475569"/>
                 </a:solidFill>
                 <a:latin typeface="Calibri" pitchFamily="34" charset="0"/>
                 <a:ea typeface="Calibri" pitchFamily="34" charset="-122"/>
                 <a:cs typeface="Calibri" pitchFamily="34" charset="-120"/>
               </a:rPr>
-              <a:t>Now rewrite each focus word below with space between letters — leave room for your breakdown.</a:t>
-            </a:r>
-            <a:endParaRPr lang="en-US" sz="1200" dirty="0"/>
-          </a:p>
-        </p:txBody>
-      </p:sp>
-      <p:sp>
-        <p:nvSpPr>
-          <p:cNvPr id="15" name="Shape 13"/>
-          <p:cNvSpPr/>
-          <p:nvPr/>
-        </p:nvSpPr>
-        <p:spPr>
-          <a:xfrm>
-            <a:off x="411480" y="3456432"/>
+              <a:t>write your breakdown below</a:t>
+            </a:r>
+            <a:endParaRPr lang="en-US" sz="900" dirty="0"/>
+          </a:p>
+        </p:txBody>
+      </p:sp>
+      <p:sp>
+        <p:nvSpPr>
+          <p:cNvPr id="23" name="Shape 21"/>
+          <p:cNvSpPr/>
+          <p:nvPr/>
+        </p:nvSpPr>
+        <p:spPr>
+          <a:xfrm>
+            <a:off x="5958840" y="3456432"/>
             <a:ext cx="2499360" cy="1005840"/>
           </a:xfrm>
           <a:prstGeom prst="rect">
@@ -18314,13 +18539,13 @@
       </p:sp>
       <p:sp>
         <p:nvSpPr>
-          <p:cNvPr id="16" name="Shape 14"/>
-          <p:cNvSpPr/>
-          <p:nvPr/>
-        </p:nvSpPr>
-        <p:spPr>
-          <a:xfrm>
-            <a:off x="411480" y="3977640"/>
+          <p:cNvPr id="24" name="Shape 22"/>
+          <p:cNvSpPr/>
+          <p:nvPr/>
+        </p:nvSpPr>
+        <p:spPr>
+          <a:xfrm>
+            <a:off x="5958840" y="3977640"/>
             <a:ext cx="2499360" cy="0"/>
           </a:xfrm>
           <a:prstGeom prst="line">
@@ -18337,13 +18562,13 @@
       </p:sp>
       <p:sp>
         <p:nvSpPr>
-          <p:cNvPr id="17" name="Text 15"/>
-          <p:cNvSpPr/>
-          <p:nvPr/>
-        </p:nvSpPr>
-        <p:spPr>
-          <a:xfrm>
-            <a:off x="411480" y="3456432"/>
+          <p:cNvPr id="25" name="Text 23"/>
+          <p:cNvSpPr/>
+          <p:nvPr/>
+        </p:nvSpPr>
+        <p:spPr>
+          <a:xfrm>
+            <a:off x="5958840" y="3456432"/>
             <a:ext cx="2499360" cy="502920"/>
           </a:xfrm>
           <a:prstGeom prst="rect">
@@ -18368,263 +18593,7 @@
                 <a:ea typeface="Trebuchet MS" pitchFamily="34" charset="-122"/>
                 <a:cs typeface="Trebuchet MS" pitchFamily="34" charset="-120"/>
               </a:rPr>
-              <a:t>rationalist</a:t>
-            </a:r>
-            <a:endParaRPr lang="en-US" sz="1400" dirty="0"/>
-          </a:p>
-        </p:txBody>
-      </p:sp>
-      <p:sp>
-        <p:nvSpPr>
-          <p:cNvPr id="18" name="Text 16"/>
-          <p:cNvSpPr/>
-          <p:nvPr/>
-        </p:nvSpPr>
-        <p:spPr>
-          <a:xfrm>
-            <a:off x="411480" y="4005072"/>
-            <a:ext cx="2499360" cy="457200"/>
-          </a:xfrm>
-          <a:prstGeom prst="rect">
-            <a:avLst/>
-          </a:prstGeom>
-          <a:noFill/>
-          <a:ln/>
-        </p:spPr>
-        <p:txBody>
-          <a:bodyPr wrap="square" lIns="0" tIns="0" rIns="0" bIns="0" rtlCol="0" anchor="ctr"/>
-          <a:lstStyle/>
-          <a:p>
-            <a:pPr algn="ctr" indent="0" marL="0">
-              <a:buNone/>
-            </a:pPr>
-            <a:r>
-              <a:rPr lang="en-US" sz="900" i="1" dirty="0">
-                <a:solidFill>
-                  <a:srgbClr val="475569"/>
-                </a:solidFill>
-                <a:latin typeface="Calibri" pitchFamily="34" charset="0"/>
-                <a:ea typeface="Calibri" pitchFamily="34" charset="-122"/>
-                <a:cs typeface="Calibri" pitchFamily="34" charset="-120"/>
-              </a:rPr>
-              <a:t>write your breakdown below</a:t>
-            </a:r>
-            <a:endParaRPr lang="en-US" sz="900" dirty="0"/>
-          </a:p>
-        </p:txBody>
-      </p:sp>
-      <p:sp>
-        <p:nvSpPr>
-          <p:cNvPr id="19" name="Shape 17"/>
-          <p:cNvSpPr/>
-          <p:nvPr/>
-        </p:nvSpPr>
-        <p:spPr>
-          <a:xfrm>
-            <a:off x="3185160" y="3456432"/>
-            <a:ext cx="2499360" cy="1005840"/>
-          </a:xfrm>
-          <a:prstGeom prst="rect">
-            <a:avLst>
-              <a:gd name="adj" fmla="val 7273"/>
-            </a:avLst>
-          </a:prstGeom>
-          <a:solidFill>
-            <a:srgbClr val="F8FAFC"/>
-          </a:solidFill>
-          <a:ln w="12700">
-            <a:solidFill>
-              <a:srgbClr val="E2E8F0"/>
-            </a:solidFill>
-            <a:prstDash val="solid"/>
-          </a:ln>
-        </p:spPr>
-      </p:sp>
-      <p:sp>
-        <p:nvSpPr>
-          <p:cNvPr id="20" name="Shape 18"/>
-          <p:cNvSpPr/>
-          <p:nvPr/>
-        </p:nvSpPr>
-        <p:spPr>
-          <a:xfrm>
-            <a:off x="3185160" y="3977640"/>
-            <a:ext cx="2499360" cy="0"/>
-          </a:xfrm>
-          <a:prstGeom prst="line">
-            <a:avLst/>
-          </a:prstGeom>
-          <a:noFill/>
-          <a:ln w="12700">
-            <a:solidFill>
-              <a:srgbClr val="E2E8F0"/>
-            </a:solidFill>
-            <a:prstDash val="dash"/>
-          </a:ln>
-        </p:spPr>
-      </p:sp>
-      <p:sp>
-        <p:nvSpPr>
-          <p:cNvPr id="21" name="Text 19"/>
-          <p:cNvSpPr/>
-          <p:nvPr/>
-        </p:nvSpPr>
-        <p:spPr>
-          <a:xfrm>
-            <a:off x="3185160" y="3456432"/>
-            <a:ext cx="2499360" cy="502920"/>
-          </a:xfrm>
-          <a:prstGeom prst="rect">
-            <a:avLst/>
-          </a:prstGeom>
-          <a:noFill/>
-          <a:ln/>
-        </p:spPr>
-        <p:txBody>
-          <a:bodyPr wrap="square" lIns="0" tIns="0" rIns="0" bIns="0" rtlCol="0" anchor="ctr"/>
-          <a:lstStyle/>
-          <a:p>
-            <a:pPr algn="ctr" indent="0" marL="0">
-              <a:buNone/>
-            </a:pPr>
-            <a:r>
-              <a:rPr lang="en-US" sz="1400" b="1" dirty="0">
-                <a:solidFill>
-                  <a:srgbClr val="0D9488"/>
-                </a:solidFill>
-                <a:latin typeface="Trebuchet MS" pitchFamily="34" charset="0"/>
-                <a:ea typeface="Trebuchet MS" pitchFamily="34" charset="-122"/>
-                <a:cs typeface="Trebuchet MS" pitchFamily="34" charset="-120"/>
-              </a:rPr>
-              <a:t>irrationality</a:t>
-            </a:r>
-            <a:endParaRPr lang="en-US" sz="1400" dirty="0"/>
-          </a:p>
-        </p:txBody>
-      </p:sp>
-      <p:sp>
-        <p:nvSpPr>
-          <p:cNvPr id="22" name="Text 20"/>
-          <p:cNvSpPr/>
-          <p:nvPr/>
-        </p:nvSpPr>
-        <p:spPr>
-          <a:xfrm>
-            <a:off x="3185160" y="4005072"/>
-            <a:ext cx="2499360" cy="457200"/>
-          </a:xfrm>
-          <a:prstGeom prst="rect">
-            <a:avLst/>
-          </a:prstGeom>
-          <a:noFill/>
-          <a:ln/>
-        </p:spPr>
-        <p:txBody>
-          <a:bodyPr wrap="square" lIns="0" tIns="0" rIns="0" bIns="0" rtlCol="0" anchor="ctr"/>
-          <a:lstStyle/>
-          <a:p>
-            <a:pPr algn="ctr" indent="0" marL="0">
-              <a:buNone/>
-            </a:pPr>
-            <a:r>
-              <a:rPr lang="en-US" sz="900" i="1" dirty="0">
-                <a:solidFill>
-                  <a:srgbClr val="475569"/>
-                </a:solidFill>
-                <a:latin typeface="Calibri" pitchFamily="34" charset="0"/>
-                <a:ea typeface="Calibri" pitchFamily="34" charset="-122"/>
-                <a:cs typeface="Calibri" pitchFamily="34" charset="-120"/>
-              </a:rPr>
-              <a:t>write your breakdown below</a:t>
-            </a:r>
-            <a:endParaRPr lang="en-US" sz="900" dirty="0"/>
-          </a:p>
-        </p:txBody>
-      </p:sp>
-      <p:sp>
-        <p:nvSpPr>
-          <p:cNvPr id="23" name="Shape 21"/>
-          <p:cNvSpPr/>
-          <p:nvPr/>
-        </p:nvSpPr>
-        <p:spPr>
-          <a:xfrm>
-            <a:off x="5958840" y="3456432"/>
-            <a:ext cx="2499360" cy="1005840"/>
-          </a:xfrm>
-          <a:prstGeom prst="rect">
-            <a:avLst>
-              <a:gd name="adj" fmla="val 7273"/>
-            </a:avLst>
-          </a:prstGeom>
-          <a:solidFill>
-            <a:srgbClr val="F8FAFC"/>
-          </a:solidFill>
-          <a:ln w="12700">
-            <a:solidFill>
-              <a:srgbClr val="E2E8F0"/>
-            </a:solidFill>
-            <a:prstDash val="solid"/>
-          </a:ln>
-        </p:spPr>
-      </p:sp>
-      <p:sp>
-        <p:nvSpPr>
-          <p:cNvPr id="24" name="Shape 22"/>
-          <p:cNvSpPr/>
-          <p:nvPr/>
-        </p:nvSpPr>
-        <p:spPr>
-          <a:xfrm>
-            <a:off x="5958840" y="3977640"/>
-            <a:ext cx="2499360" cy="0"/>
-          </a:xfrm>
-          <a:prstGeom prst="line">
-            <a:avLst/>
-          </a:prstGeom>
-          <a:noFill/>
-          <a:ln w="12700">
-            <a:solidFill>
-              <a:srgbClr val="E2E8F0"/>
-            </a:solidFill>
-            <a:prstDash val="dash"/>
-          </a:ln>
-        </p:spPr>
-      </p:sp>
-      <p:sp>
-        <p:nvSpPr>
-          <p:cNvPr id="25" name="Text 23"/>
-          <p:cNvSpPr/>
-          <p:nvPr/>
-        </p:nvSpPr>
-        <p:spPr>
-          <a:xfrm>
-            <a:off x="5958840" y="3456432"/>
-            <a:ext cx="2499360" cy="502920"/>
-          </a:xfrm>
-          <a:prstGeom prst="rect">
-            <a:avLst/>
-          </a:prstGeom>
-          <a:noFill/>
-          <a:ln/>
-        </p:spPr>
-        <p:txBody>
-          <a:bodyPr wrap="square" lIns="0" tIns="0" rIns="0" bIns="0" rtlCol="0" anchor="ctr"/>
-          <a:lstStyle/>
-          <a:p>
-            <a:pPr algn="ctr" indent="0" marL="0">
-              <a:buNone/>
-            </a:pPr>
-            <a:r>
-              <a:rPr lang="en-US" sz="1400" b="1" dirty="0">
-                <a:solidFill>
-                  <a:srgbClr val="0D9488"/>
-                </a:solidFill>
-                <a:latin typeface="Trebuchet MS" pitchFamily="34" charset="0"/>
-                <a:ea typeface="Trebuchet MS" pitchFamily="34" charset="-122"/>
-                <a:cs typeface="Trebuchet MS" pitchFamily="34" charset="-120"/>
-              </a:rPr>
-              <a:t>rationally</a:t>
+              <a:t>rationality</a:t>
             </a:r>
             <a:endParaRPr lang="en-US" sz="1400" dirty="0"/>
           </a:p>
@@ -25488,7 +25457,7 @@
                 <a:ea typeface="Calibri" pitchFamily="34" charset="-122"/>
                 <a:cs typeface="Calibri" pitchFamily="34" charset="-120"/>
               </a:rPr>
-              <a:t>the quality of being</a:t>
+              <a:t>the quality or state of</a:t>
             </a:r>
             <a:endParaRPr lang="en-US" sz="850" dirty="0"/>
           </a:p>
@@ -27343,7 +27312,7 @@
                 <a:ea typeface="Calibri" pitchFamily="34" charset="-122"/>
                 <a:cs typeface="Calibri" pitchFamily="34" charset="-120"/>
               </a:rPr>
-              <a:t>the quality of being</a:t>
+              <a:t>the quality or state of</a:t>
             </a:r>
             <a:endParaRPr lang="en-US" sz="850" dirty="0"/>
           </a:p>
@@ -29031,7 +29000,7 @@
                 <a:ea typeface="Calibri" pitchFamily="34" charset="-122"/>
                 <a:cs typeface="Calibri" pitchFamily="34" charset="-120"/>
               </a:rPr>
-              <a:t>the quality of being</a:t>
+              <a:t>the quality or state of</a:t>
             </a:r>
             <a:endParaRPr lang="en-US" sz="850" dirty="0"/>
           </a:p>
@@ -31004,7 +30973,7 @@
                 <a:ea typeface="Trebuchet MS" pitchFamily="34" charset="-122"/>
                 <a:cs typeface="Trebuchet MS" pitchFamily="34" charset="-120"/>
               </a:rPr>
-              <a:t>rationally</a:t>
+              <a:t>rationality</a:t>
             </a:r>
             <a:endParaRPr lang="en-US" sz="2800" dirty="0"/>
           </a:p>
@@ -31831,7 +31800,7 @@
                 <a:ea typeface="Trebuchet MS" pitchFamily="34" charset="-122"/>
                 <a:cs typeface="Trebuchet MS" pitchFamily="34" charset="-120"/>
               </a:rPr>
-              <a:t>rationally</a:t>
+              <a:t>rationality</a:t>
             </a:r>
             <a:endParaRPr lang="en-US" sz="2800" dirty="0"/>
           </a:p>
@@ -32082,7 +32051,7 @@
                 <a:ea typeface="Trebuchet MS" pitchFamily="34" charset="-122"/>
                 <a:cs typeface="Trebuchet MS" pitchFamily="34" charset="-120"/>
               </a:rPr>
-              <a:t>ly</a:t>
+              <a:t>ity</a:t>
             </a:r>
             <a:endParaRPr lang="en-US" sz="1300" dirty="0"/>
           </a:p>
@@ -32121,7 +32090,7 @@
                 <a:ea typeface="Calibri" pitchFamily="34" charset="-122"/>
                 <a:cs typeface="Calibri" pitchFamily="34" charset="-120"/>
               </a:rPr>
-              <a:t>in a way that is</a:t>
+              <a:t>the quality or state of</a:t>
             </a:r>
             <a:endParaRPr lang="en-US" sz="850" dirty="0"/>
           </a:p>
@@ -32816,7 +32785,7 @@
                 <a:ea typeface="Trebuchet MS" pitchFamily="34" charset="-122"/>
                 <a:cs typeface="Trebuchet MS" pitchFamily="34" charset="-120"/>
               </a:rPr>
-              <a:t>rationally</a:t>
+              <a:t>rationality</a:t>
             </a:r>
             <a:endParaRPr lang="en-US" sz="2800" dirty="0"/>
           </a:p>
@@ -33067,7 +33036,7 @@
                 <a:ea typeface="Trebuchet MS" pitchFamily="34" charset="-122"/>
                 <a:cs typeface="Trebuchet MS" pitchFamily="34" charset="-120"/>
               </a:rPr>
-              <a:t>ly</a:t>
+              <a:t>ity</a:t>
             </a:r>
             <a:endParaRPr lang="en-US" sz="1300" dirty="0"/>
           </a:p>
@@ -33106,7 +33075,7 @@
                 <a:ea typeface="Calibri" pitchFamily="34" charset="-122"/>
                 <a:cs typeface="Calibri" pitchFamily="34" charset="-120"/>
               </a:rPr>
-              <a:t>in a way that is</a:t>
+              <a:t>the quality or state of</a:t>
             </a:r>
             <a:endParaRPr lang="en-US" sz="850" dirty="0"/>
           </a:p>
@@ -33213,8 +33182,8 @@
         </p:nvSpPr>
         <p:spPr>
           <a:xfrm>
-            <a:off x="1975104" y="3364992"/>
-            <a:ext cx="1554480" cy="475488"/>
+            <a:off x="1978152" y="3364992"/>
+            <a:ext cx="1225296" cy="475488"/>
           </a:xfrm>
           <a:prstGeom prst="rect">
             <a:avLst>
@@ -33240,8 +33209,8 @@
         </p:nvSpPr>
         <p:spPr>
           <a:xfrm>
-            <a:off x="1975104" y="3364992"/>
-            <a:ext cx="1554480" cy="475488"/>
+            <a:off x="1978152" y="3364992"/>
+            <a:ext cx="1225296" cy="475488"/>
           </a:xfrm>
           <a:prstGeom prst="rect">
             <a:avLst/>
@@ -33279,8 +33248,8 @@
         </p:nvSpPr>
         <p:spPr>
           <a:xfrm>
-            <a:off x="3529584" y="3364992"/>
-            <a:ext cx="73152" cy="475488"/>
+            <a:off x="3203448" y="3364992"/>
+            <a:ext cx="76200" cy="475488"/>
           </a:xfrm>
           <a:prstGeom prst="rect">
             <a:avLst/>
@@ -33318,8 +33287,8 @@
         </p:nvSpPr>
         <p:spPr>
           <a:xfrm>
-            <a:off x="3602736" y="3364992"/>
-            <a:ext cx="1554480" cy="475488"/>
+            <a:off x="3279648" y="3364992"/>
+            <a:ext cx="1225296" cy="475488"/>
           </a:xfrm>
           <a:prstGeom prst="rect">
             <a:avLst>
@@ -33345,8 +33314,8 @@
         </p:nvSpPr>
         <p:spPr>
           <a:xfrm>
-            <a:off x="3602736" y="3364992"/>
-            <a:ext cx="1554480" cy="475488"/>
+            <a:off x="3279648" y="3364992"/>
+            <a:ext cx="1225296" cy="475488"/>
           </a:xfrm>
           <a:prstGeom prst="rect">
             <a:avLst/>
@@ -33384,8 +33353,8 @@
         </p:nvSpPr>
         <p:spPr>
           <a:xfrm>
-            <a:off x="5157216" y="3364992"/>
-            <a:ext cx="73152" cy="475488"/>
+            <a:off x="4504944" y="3364992"/>
+            <a:ext cx="76200" cy="475488"/>
           </a:xfrm>
           <a:prstGeom prst="rect">
             <a:avLst/>
@@ -33423,8 +33392,8 @@
         </p:nvSpPr>
         <p:spPr>
           <a:xfrm>
-            <a:off x="5230368" y="3364992"/>
-            <a:ext cx="1554480" cy="475488"/>
+            <a:off x="4581144" y="3364992"/>
+            <a:ext cx="1225296" cy="475488"/>
           </a:xfrm>
           <a:prstGeom prst="rect">
             <a:avLst>
@@ -33450,8 +33419,8 @@
         </p:nvSpPr>
         <p:spPr>
           <a:xfrm>
-            <a:off x="5230368" y="3364992"/>
-            <a:ext cx="1554480" cy="475488"/>
+            <a:off x="4581144" y="3364992"/>
+            <a:ext cx="1225296" cy="475488"/>
           </a:xfrm>
           <a:prstGeom prst="rect">
             <a:avLst/>
@@ -33489,8 +33458,8 @@
         </p:nvSpPr>
         <p:spPr>
           <a:xfrm>
-            <a:off x="6784848" y="3364992"/>
-            <a:ext cx="73152" cy="475488"/>
+            <a:off x="5806440" y="3364992"/>
+            <a:ext cx="76200" cy="475488"/>
           </a:xfrm>
           <a:prstGeom prst="rect">
             <a:avLst/>
@@ -33528,8 +33497,8 @@
         </p:nvSpPr>
         <p:spPr>
           <a:xfrm>
-            <a:off x="6858000" y="3364992"/>
-            <a:ext cx="1554480" cy="475488"/>
+            <a:off x="5882640" y="3364992"/>
+            <a:ext cx="1225296" cy="475488"/>
           </a:xfrm>
           <a:prstGeom prst="rect">
             <a:avLst>
@@ -33555,8 +33524,8 @@
         </p:nvSpPr>
         <p:spPr>
           <a:xfrm>
-            <a:off x="6858000" y="3364992"/>
-            <a:ext cx="1554480" cy="475488"/>
+            <a:off x="5882640" y="3364992"/>
+            <a:ext cx="1225296" cy="475488"/>
           </a:xfrm>
           <a:prstGeom prst="rect">
             <a:avLst/>
@@ -33580,7 +33549,7 @@
                 <a:ea typeface="Trebuchet MS" pitchFamily="34" charset="-122"/>
                 <a:cs typeface="Trebuchet MS" pitchFamily="34" charset="-120"/>
               </a:rPr>
-              <a:t>ly</a:t>
+              <a:t>i</a:t>
             </a:r>
             <a:endParaRPr lang="en-US" sz="1400" dirty="0"/>
           </a:p>
@@ -33588,7 +33557,112 @@
       </p:sp>
       <p:sp>
         <p:nvSpPr>
-          <p:cNvPr id="36" name="Shape 34"/>
+          <p:cNvPr id="36" name="Text 34"/>
+          <p:cNvSpPr/>
+          <p:nvPr/>
+        </p:nvSpPr>
+        <p:spPr>
+          <a:xfrm>
+            <a:off x="7107936" y="3364992"/>
+            <a:ext cx="76200" cy="475488"/>
+          </a:xfrm>
+          <a:prstGeom prst="rect">
+            <a:avLst/>
+          </a:prstGeom>
+          <a:noFill/>
+          <a:ln/>
+        </p:spPr>
+        <p:txBody>
+          <a:bodyPr wrap="square" lIns="0" tIns="0" rIns="0" bIns="0" rtlCol="0" anchor="ctr"/>
+          <a:lstStyle/>
+          <a:p>
+            <a:pPr algn="ctr" indent="0" marL="0">
+              <a:buNone/>
+            </a:pPr>
+            <a:r>
+              <a:rPr lang="en-US" sz="1600" b="1" dirty="0">
+                <a:solidFill>
+                  <a:srgbClr val="0D9488"/>
+                </a:solidFill>
+                <a:latin typeface="Trebuchet MS" pitchFamily="34" charset="0"/>
+                <a:ea typeface="Trebuchet MS" pitchFamily="34" charset="-122"/>
+                <a:cs typeface="Trebuchet MS" pitchFamily="34" charset="-120"/>
+              </a:rPr>
+              <a:t>·</a:t>
+            </a:r>
+            <a:endParaRPr lang="en-US" sz="1600" dirty="0"/>
+          </a:p>
+        </p:txBody>
+      </p:sp>
+      <p:sp>
+        <p:nvSpPr>
+          <p:cNvPr id="37" name="Shape 35"/>
+          <p:cNvSpPr/>
+          <p:nvPr/>
+        </p:nvSpPr>
+        <p:spPr>
+          <a:xfrm>
+            <a:off x="7184136" y="3364992"/>
+            <a:ext cx="1225296" cy="475488"/>
+          </a:xfrm>
+          <a:prstGeom prst="rect">
+            <a:avLst>
+              <a:gd name="adj" fmla="val 9615"/>
+            </a:avLst>
+          </a:prstGeom>
+          <a:solidFill>
+            <a:srgbClr val="FFFFFF"/>
+          </a:solidFill>
+          <a:ln w="12700">
+            <a:solidFill>
+              <a:srgbClr val="0D9488"/>
+            </a:solidFill>
+            <a:prstDash val="solid"/>
+          </a:ln>
+        </p:spPr>
+      </p:sp>
+      <p:sp>
+        <p:nvSpPr>
+          <p:cNvPr id="38" name="Text 36"/>
+          <p:cNvSpPr/>
+          <p:nvPr/>
+        </p:nvSpPr>
+        <p:spPr>
+          <a:xfrm>
+            <a:off x="7184136" y="3364992"/>
+            <a:ext cx="1225296" cy="475488"/>
+          </a:xfrm>
+          <a:prstGeom prst="rect">
+            <a:avLst/>
+          </a:prstGeom>
+          <a:noFill/>
+          <a:ln/>
+        </p:spPr>
+        <p:txBody>
+          <a:bodyPr wrap="square" lIns="0" tIns="0" rIns="0" bIns="0" rtlCol="0" anchor="ctr"/>
+          <a:lstStyle/>
+          <a:p>
+            <a:pPr algn="ctr" indent="0" marL="0">
+              <a:buNone/>
+            </a:pPr>
+            <a:r>
+              <a:rPr lang="en-US" sz="1400" b="1" dirty="0">
+                <a:solidFill>
+                  <a:srgbClr val="0D9488"/>
+                </a:solidFill>
+                <a:latin typeface="Trebuchet MS" pitchFamily="34" charset="0"/>
+                <a:ea typeface="Trebuchet MS" pitchFamily="34" charset="-122"/>
+                <a:cs typeface="Trebuchet MS" pitchFamily="34" charset="-120"/>
+              </a:rPr>
+              <a:t>ty</a:t>
+            </a:r>
+            <a:endParaRPr lang="en-US" sz="1400" dirty="0"/>
+          </a:p>
+        </p:txBody>
+      </p:sp>
+      <p:sp>
+        <p:nvSpPr>
+          <p:cNvPr id="39" name="Shape 37"/>
           <p:cNvSpPr/>
           <p:nvPr/>
         </p:nvSpPr>
@@ -33615,7 +33689,7 @@
       </p:sp>
       <p:sp>
         <p:nvSpPr>
-          <p:cNvPr id="37" name="Text 35"/>
+          <p:cNvPr id="40" name="Text 38"/>
           <p:cNvSpPr/>
           <p:nvPr/>
         </p:nvSpPr>
@@ -33654,7 +33728,7 @@
       </p:sp>
       <p:sp>
         <p:nvSpPr>
-          <p:cNvPr id="38" name="Shape 36"/>
+          <p:cNvPr id="41" name="Shape 39"/>
           <p:cNvSpPr/>
           <p:nvPr/>
         </p:nvSpPr>
@@ -33681,7 +33755,7 @@
       </p:sp>
       <p:sp>
         <p:nvSpPr>
-          <p:cNvPr id="39" name="Text 37"/>
+          <p:cNvPr id="42" name="Text 40"/>
           <p:cNvSpPr/>
           <p:nvPr/>
         </p:nvSpPr>
@@ -34143,7 +34217,7 @@
                 <a:ea typeface="Trebuchet MS" pitchFamily="34" charset="-122"/>
                 <a:cs typeface="Trebuchet MS" pitchFamily="34" charset="-120"/>
               </a:rPr>
-              <a:t>rationally</a:t>
+              <a:t>rationality</a:t>
             </a:r>
             <a:endParaRPr lang="en-US" sz="2800" dirty="0"/>
           </a:p>
@@ -34394,7 +34468,7 @@
                 <a:ea typeface="Trebuchet MS" pitchFamily="34" charset="-122"/>
                 <a:cs typeface="Trebuchet MS" pitchFamily="34" charset="-120"/>
               </a:rPr>
-              <a:t>ly</a:t>
+              <a:t>ity</a:t>
             </a:r>
             <a:endParaRPr lang="en-US" sz="1300" dirty="0"/>
           </a:p>
@@ -34433,7 +34507,7 @@
                 <a:ea typeface="Calibri" pitchFamily="34" charset="-122"/>
                 <a:cs typeface="Calibri" pitchFamily="34" charset="-120"/>
               </a:rPr>
-              <a:t>in a way that is</a:t>
+              <a:t>the quality or state of</a:t>
             </a:r>
             <a:endParaRPr lang="en-US" sz="850" dirty="0"/>
           </a:p>
@@ -34540,8 +34614,8 @@
         </p:nvSpPr>
         <p:spPr>
           <a:xfrm>
-            <a:off x="1975104" y="3364992"/>
-            <a:ext cx="1554480" cy="475488"/>
+            <a:off x="1978152" y="3364992"/>
+            <a:ext cx="1225296" cy="475488"/>
           </a:xfrm>
           <a:prstGeom prst="rect">
             <a:avLst>
@@ -34567,8 +34641,8 @@
         </p:nvSpPr>
         <p:spPr>
           <a:xfrm>
-            <a:off x="1975104" y="3364992"/>
-            <a:ext cx="1554480" cy="475488"/>
+            <a:off x="1978152" y="3364992"/>
+            <a:ext cx="1225296" cy="475488"/>
           </a:xfrm>
           <a:prstGeom prst="rect">
             <a:avLst/>
@@ -34606,8 +34680,8 @@
         </p:nvSpPr>
         <p:spPr>
           <a:xfrm>
-            <a:off x="3529584" y="3364992"/>
-            <a:ext cx="73152" cy="475488"/>
+            <a:off x="3203448" y="3364992"/>
+            <a:ext cx="76200" cy="475488"/>
           </a:xfrm>
           <a:prstGeom prst="rect">
             <a:avLst/>
@@ -34645,8 +34719,8 @@
         </p:nvSpPr>
         <p:spPr>
           <a:xfrm>
-            <a:off x="3602736" y="3364992"/>
-            <a:ext cx="1554480" cy="475488"/>
+            <a:off x="3279648" y="3364992"/>
+            <a:ext cx="1225296" cy="475488"/>
           </a:xfrm>
           <a:prstGeom prst="rect">
             <a:avLst>
@@ -34672,8 +34746,8 @@
         </p:nvSpPr>
         <p:spPr>
           <a:xfrm>
-            <a:off x="3602736" y="3364992"/>
-            <a:ext cx="1554480" cy="475488"/>
+            <a:off x="3279648" y="3364992"/>
+            <a:ext cx="1225296" cy="475488"/>
           </a:xfrm>
           <a:prstGeom prst="rect">
             <a:avLst/>
@@ -34711,8 +34785,8 @@
         </p:nvSpPr>
         <p:spPr>
           <a:xfrm>
-            <a:off x="5157216" y="3364992"/>
-            <a:ext cx="73152" cy="475488"/>
+            <a:off x="4504944" y="3364992"/>
+            <a:ext cx="76200" cy="475488"/>
           </a:xfrm>
           <a:prstGeom prst="rect">
             <a:avLst/>
@@ -34750,8 +34824,8 @@
         </p:nvSpPr>
         <p:spPr>
           <a:xfrm>
-            <a:off x="5230368" y="3364992"/>
-            <a:ext cx="1554480" cy="475488"/>
+            <a:off x="4581144" y="3364992"/>
+            <a:ext cx="1225296" cy="475488"/>
           </a:xfrm>
           <a:prstGeom prst="rect">
             <a:avLst>
@@ -34777,8 +34851,8 @@
         </p:nvSpPr>
         <p:spPr>
           <a:xfrm>
-            <a:off x="5230368" y="3364992"/>
-            <a:ext cx="1554480" cy="475488"/>
+            <a:off x="4581144" y="3364992"/>
+            <a:ext cx="1225296" cy="475488"/>
           </a:xfrm>
           <a:prstGeom prst="rect">
             <a:avLst/>
@@ -34816,8 +34890,8 @@
         </p:nvSpPr>
         <p:spPr>
           <a:xfrm>
-            <a:off x="6784848" y="3364992"/>
-            <a:ext cx="73152" cy="475488"/>
+            <a:off x="5806440" y="3364992"/>
+            <a:ext cx="76200" cy="475488"/>
           </a:xfrm>
           <a:prstGeom prst="rect">
             <a:avLst/>
@@ -34855,8 +34929,8 @@
         </p:nvSpPr>
         <p:spPr>
           <a:xfrm>
-            <a:off x="6858000" y="3364992"/>
-            <a:ext cx="1554480" cy="475488"/>
+            <a:off x="5882640" y="3364992"/>
+            <a:ext cx="1225296" cy="475488"/>
           </a:xfrm>
           <a:prstGeom prst="rect">
             <a:avLst>
@@ -34882,8 +34956,8 @@
         </p:nvSpPr>
         <p:spPr>
           <a:xfrm>
-            <a:off x="6858000" y="3364992"/>
-            <a:ext cx="1554480" cy="475488"/>
+            <a:off x="5882640" y="3364992"/>
+            <a:ext cx="1225296" cy="475488"/>
           </a:xfrm>
           <a:prstGeom prst="rect">
             <a:avLst/>
@@ -34907,7 +34981,7 @@
                 <a:ea typeface="Trebuchet MS" pitchFamily="34" charset="-122"/>
                 <a:cs typeface="Trebuchet MS" pitchFamily="34" charset="-120"/>
               </a:rPr>
-              <a:t>ly</a:t>
+              <a:t>i</a:t>
             </a:r>
             <a:endParaRPr lang="en-US" sz="1400" dirty="0"/>
           </a:p>
@@ -34915,7 +34989,112 @@
       </p:sp>
       <p:sp>
         <p:nvSpPr>
-          <p:cNvPr id="36" name="Shape 34"/>
+          <p:cNvPr id="36" name="Text 34"/>
+          <p:cNvSpPr/>
+          <p:nvPr/>
+        </p:nvSpPr>
+        <p:spPr>
+          <a:xfrm>
+            <a:off x="7107936" y="3364992"/>
+            <a:ext cx="76200" cy="475488"/>
+          </a:xfrm>
+          <a:prstGeom prst="rect">
+            <a:avLst/>
+          </a:prstGeom>
+          <a:noFill/>
+          <a:ln/>
+        </p:spPr>
+        <p:txBody>
+          <a:bodyPr wrap="square" lIns="0" tIns="0" rIns="0" bIns="0" rtlCol="0" anchor="ctr"/>
+          <a:lstStyle/>
+          <a:p>
+            <a:pPr algn="ctr" indent="0" marL="0">
+              <a:buNone/>
+            </a:pPr>
+            <a:r>
+              <a:rPr lang="en-US" sz="1600" b="1" dirty="0">
+                <a:solidFill>
+                  <a:srgbClr val="0D9488"/>
+                </a:solidFill>
+                <a:latin typeface="Trebuchet MS" pitchFamily="34" charset="0"/>
+                <a:ea typeface="Trebuchet MS" pitchFamily="34" charset="-122"/>
+                <a:cs typeface="Trebuchet MS" pitchFamily="34" charset="-120"/>
+              </a:rPr>
+              <a:t>·</a:t>
+            </a:r>
+            <a:endParaRPr lang="en-US" sz="1600" dirty="0"/>
+          </a:p>
+        </p:txBody>
+      </p:sp>
+      <p:sp>
+        <p:nvSpPr>
+          <p:cNvPr id="37" name="Shape 35"/>
+          <p:cNvSpPr/>
+          <p:nvPr/>
+        </p:nvSpPr>
+        <p:spPr>
+          <a:xfrm>
+            <a:off x="7184136" y="3364992"/>
+            <a:ext cx="1225296" cy="475488"/>
+          </a:xfrm>
+          <a:prstGeom prst="rect">
+            <a:avLst>
+              <a:gd name="adj" fmla="val 9615"/>
+            </a:avLst>
+          </a:prstGeom>
+          <a:solidFill>
+            <a:srgbClr val="FFFFFF"/>
+          </a:solidFill>
+          <a:ln w="12700">
+            <a:solidFill>
+              <a:srgbClr val="0D9488"/>
+            </a:solidFill>
+            <a:prstDash val="solid"/>
+          </a:ln>
+        </p:spPr>
+      </p:sp>
+      <p:sp>
+        <p:nvSpPr>
+          <p:cNvPr id="38" name="Text 36"/>
+          <p:cNvSpPr/>
+          <p:nvPr/>
+        </p:nvSpPr>
+        <p:spPr>
+          <a:xfrm>
+            <a:off x="7184136" y="3364992"/>
+            <a:ext cx="1225296" cy="475488"/>
+          </a:xfrm>
+          <a:prstGeom prst="rect">
+            <a:avLst/>
+          </a:prstGeom>
+          <a:noFill/>
+          <a:ln/>
+        </p:spPr>
+        <p:txBody>
+          <a:bodyPr wrap="square" lIns="0" tIns="0" rIns="0" bIns="0" rtlCol="0" anchor="ctr"/>
+          <a:lstStyle/>
+          <a:p>
+            <a:pPr algn="ctr" indent="0" marL="0">
+              <a:buNone/>
+            </a:pPr>
+            <a:r>
+              <a:rPr lang="en-US" sz="1400" b="1" dirty="0">
+                <a:solidFill>
+                  <a:srgbClr val="0D9488"/>
+                </a:solidFill>
+                <a:latin typeface="Trebuchet MS" pitchFamily="34" charset="0"/>
+                <a:ea typeface="Trebuchet MS" pitchFamily="34" charset="-122"/>
+                <a:cs typeface="Trebuchet MS" pitchFamily="34" charset="-120"/>
+              </a:rPr>
+              <a:t>ty</a:t>
+            </a:r>
+            <a:endParaRPr lang="en-US" sz="1400" dirty="0"/>
+          </a:p>
+        </p:txBody>
+      </p:sp>
+      <p:sp>
+        <p:nvSpPr>
+          <p:cNvPr id="39" name="Shape 37"/>
           <p:cNvSpPr/>
           <p:nvPr/>
         </p:nvSpPr>
@@ -34942,7 +35121,7 @@
       </p:sp>
       <p:sp>
         <p:nvSpPr>
-          <p:cNvPr id="37" name="Text 35"/>
+          <p:cNvPr id="40" name="Text 38"/>
           <p:cNvSpPr/>
           <p:nvPr/>
         </p:nvSpPr>
@@ -34981,7 +35160,7 @@
       </p:sp>
       <p:sp>
         <p:nvSpPr>
-          <p:cNvPr id="38" name="Shape 36"/>
+          <p:cNvPr id="41" name="Shape 39"/>
           <p:cNvSpPr/>
           <p:nvPr/>
         </p:nvSpPr>
@@ -35008,14 +35187,14 @@
       </p:sp>
       <p:sp>
         <p:nvSpPr>
-          <p:cNvPr id="39" name="Shape 37"/>
-          <p:cNvSpPr/>
-          <p:nvPr/>
-        </p:nvSpPr>
-        <p:spPr>
-          <a:xfrm>
-            <a:off x="2023872" y="4169664"/>
-            <a:ext cx="685800" cy="384048"/>
+          <p:cNvPr id="42" name="Shape 40"/>
+          <p:cNvSpPr/>
+          <p:nvPr/>
+        </p:nvSpPr>
+        <p:spPr>
+          <a:xfrm>
+            <a:off x="1951828" y="4169664"/>
+            <a:ext cx="603504" cy="384048"/>
           </a:xfrm>
           <a:prstGeom prst="rect">
             <a:avLst>
@@ -35035,14 +35214,14 @@
       </p:sp>
       <p:sp>
         <p:nvSpPr>
-          <p:cNvPr id="40" name="Text 38"/>
-          <p:cNvSpPr/>
-          <p:nvPr/>
-        </p:nvSpPr>
-        <p:spPr>
-          <a:xfrm>
-            <a:off x="2023872" y="4169664"/>
-            <a:ext cx="685800" cy="384048"/>
+          <p:cNvPr id="43" name="Text 41"/>
+          <p:cNvSpPr/>
+          <p:nvPr/>
+        </p:nvSpPr>
+        <p:spPr>
+          <a:xfrm>
+            <a:off x="1951828" y="4169664"/>
+            <a:ext cx="603504" cy="384048"/>
           </a:xfrm>
           <a:prstGeom prst="rect">
             <a:avLst/>
@@ -35074,14 +35253,14 @@
       </p:sp>
       <p:sp>
         <p:nvSpPr>
-          <p:cNvPr id="41" name="Shape 39"/>
-          <p:cNvSpPr/>
-          <p:nvPr/>
-        </p:nvSpPr>
-        <p:spPr>
-          <a:xfrm>
-            <a:off x="2831592" y="4169664"/>
-            <a:ext cx="685800" cy="384048"/>
+          <p:cNvPr id="44" name="Shape 42"/>
+          <p:cNvSpPr/>
+          <p:nvPr/>
+        </p:nvSpPr>
+        <p:spPr>
+          <a:xfrm>
+            <a:off x="2605209" y="4169664"/>
+            <a:ext cx="603504" cy="384048"/>
           </a:xfrm>
           <a:prstGeom prst="rect">
             <a:avLst>
@@ -35101,14 +35280,14 @@
       </p:sp>
       <p:sp>
         <p:nvSpPr>
-          <p:cNvPr id="42" name="Text 40"/>
-          <p:cNvSpPr/>
-          <p:nvPr/>
-        </p:nvSpPr>
-        <p:spPr>
-          <a:xfrm>
-            <a:off x="2831592" y="4169664"/>
-            <a:ext cx="685800" cy="384048"/>
+          <p:cNvPr id="45" name="Text 43"/>
+          <p:cNvSpPr/>
+          <p:nvPr/>
+        </p:nvSpPr>
+        <p:spPr>
+          <a:xfrm>
+            <a:off x="2605209" y="4169664"/>
+            <a:ext cx="603504" cy="384048"/>
           </a:xfrm>
           <a:prstGeom prst="rect">
             <a:avLst/>
@@ -35140,14 +35319,14 @@
       </p:sp>
       <p:sp>
         <p:nvSpPr>
-          <p:cNvPr id="43" name="Shape 41"/>
-          <p:cNvSpPr/>
-          <p:nvPr/>
-        </p:nvSpPr>
-        <p:spPr>
-          <a:xfrm>
-            <a:off x="3639312" y="4169664"/>
-            <a:ext cx="685800" cy="384048"/>
+          <p:cNvPr id="46" name="Shape 44"/>
+          <p:cNvSpPr/>
+          <p:nvPr/>
+        </p:nvSpPr>
+        <p:spPr>
+          <a:xfrm>
+            <a:off x="3258589" y="4169664"/>
+            <a:ext cx="603504" cy="384048"/>
           </a:xfrm>
           <a:prstGeom prst="rect">
             <a:avLst>
@@ -35167,14 +35346,14 @@
       </p:sp>
       <p:sp>
         <p:nvSpPr>
-          <p:cNvPr id="44" name="Text 42"/>
-          <p:cNvSpPr/>
-          <p:nvPr/>
-        </p:nvSpPr>
-        <p:spPr>
-          <a:xfrm>
-            <a:off x="3639312" y="4169664"/>
-            <a:ext cx="685800" cy="384048"/>
+          <p:cNvPr id="47" name="Text 45"/>
+          <p:cNvSpPr/>
+          <p:nvPr/>
+        </p:nvSpPr>
+        <p:spPr>
+          <a:xfrm>
+            <a:off x="3258589" y="4169664"/>
+            <a:ext cx="603504" cy="384048"/>
           </a:xfrm>
           <a:prstGeom prst="rect">
             <a:avLst/>
@@ -35206,14 +35385,14 @@
       </p:sp>
       <p:sp>
         <p:nvSpPr>
-          <p:cNvPr id="45" name="Text 43"/>
-          <p:cNvSpPr/>
-          <p:nvPr/>
-        </p:nvSpPr>
-        <p:spPr>
-          <a:xfrm>
-            <a:off x="3639312" y="4572000"/>
-            <a:ext cx="685800" cy="219456"/>
+          <p:cNvPr id="48" name="Text 46"/>
+          <p:cNvSpPr/>
+          <p:nvPr/>
+        </p:nvSpPr>
+        <p:spPr>
+          <a:xfrm>
+            <a:off x="3258589" y="4572000"/>
+            <a:ext cx="603504" cy="219456"/>
           </a:xfrm>
           <a:prstGeom prst="rect">
             <a:avLst/>
@@ -35245,14 +35424,14 @@
       </p:sp>
       <p:sp>
         <p:nvSpPr>
-          <p:cNvPr id="46" name="Shape 44"/>
-          <p:cNvSpPr/>
-          <p:nvPr/>
-        </p:nvSpPr>
-        <p:spPr>
-          <a:xfrm>
-            <a:off x="4447032" y="4169664"/>
-            <a:ext cx="685800" cy="384048"/>
+          <p:cNvPr id="49" name="Shape 47"/>
+          <p:cNvSpPr/>
+          <p:nvPr/>
+        </p:nvSpPr>
+        <p:spPr>
+          <a:xfrm>
+            <a:off x="3911969" y="4169664"/>
+            <a:ext cx="603504" cy="384048"/>
           </a:xfrm>
           <a:prstGeom prst="rect">
             <a:avLst>
@@ -35272,14 +35451,14 @@
       </p:sp>
       <p:sp>
         <p:nvSpPr>
-          <p:cNvPr id="47" name="Text 45"/>
-          <p:cNvSpPr/>
-          <p:nvPr/>
-        </p:nvSpPr>
-        <p:spPr>
-          <a:xfrm>
-            <a:off x="4447032" y="4169664"/>
-            <a:ext cx="685800" cy="384048"/>
+          <p:cNvPr id="50" name="Text 48"/>
+          <p:cNvSpPr/>
+          <p:nvPr/>
+        </p:nvSpPr>
+        <p:spPr>
+          <a:xfrm>
+            <a:off x="3911969" y="4169664"/>
+            <a:ext cx="603504" cy="384048"/>
           </a:xfrm>
           <a:prstGeom prst="rect">
             <a:avLst/>
@@ -35311,14 +35490,14 @@
       </p:sp>
       <p:sp>
         <p:nvSpPr>
-          <p:cNvPr id="48" name="Shape 46"/>
-          <p:cNvSpPr/>
-          <p:nvPr/>
-        </p:nvSpPr>
-        <p:spPr>
-          <a:xfrm>
-            <a:off x="5254752" y="4169664"/>
-            <a:ext cx="685800" cy="384048"/>
+          <p:cNvPr id="51" name="Shape 49"/>
+          <p:cNvSpPr/>
+          <p:nvPr/>
+        </p:nvSpPr>
+        <p:spPr>
+          <a:xfrm>
+            <a:off x="4565350" y="4169664"/>
+            <a:ext cx="603504" cy="384048"/>
           </a:xfrm>
           <a:prstGeom prst="rect">
             <a:avLst>
@@ -35338,14 +35517,14 @@
       </p:sp>
       <p:sp>
         <p:nvSpPr>
-          <p:cNvPr id="49" name="Text 47"/>
-          <p:cNvSpPr/>
-          <p:nvPr/>
-        </p:nvSpPr>
-        <p:spPr>
-          <a:xfrm>
-            <a:off x="5254752" y="4169664"/>
-            <a:ext cx="685800" cy="384048"/>
+          <p:cNvPr id="52" name="Text 50"/>
+          <p:cNvSpPr/>
+          <p:nvPr/>
+        </p:nvSpPr>
+        <p:spPr>
+          <a:xfrm>
+            <a:off x="4565350" y="4169664"/>
+            <a:ext cx="603504" cy="384048"/>
           </a:xfrm>
           <a:prstGeom prst="rect">
             <a:avLst/>
@@ -35377,14 +35556,14 @@
       </p:sp>
       <p:sp>
         <p:nvSpPr>
-          <p:cNvPr id="50" name="Shape 48"/>
-          <p:cNvSpPr/>
-          <p:nvPr/>
-        </p:nvSpPr>
-        <p:spPr>
-          <a:xfrm>
-            <a:off x="6062472" y="4169664"/>
-            <a:ext cx="685800" cy="384048"/>
+          <p:cNvPr id="53" name="Shape 51"/>
+          <p:cNvSpPr/>
+          <p:nvPr/>
+        </p:nvSpPr>
+        <p:spPr>
+          <a:xfrm>
+            <a:off x="5218730" y="4169664"/>
+            <a:ext cx="603504" cy="384048"/>
           </a:xfrm>
           <a:prstGeom prst="rect">
             <a:avLst>
@@ -35404,14 +35583,14 @@
       </p:sp>
       <p:sp>
         <p:nvSpPr>
-          <p:cNvPr id="51" name="Text 49"/>
-          <p:cNvSpPr/>
-          <p:nvPr/>
-        </p:nvSpPr>
-        <p:spPr>
-          <a:xfrm>
-            <a:off x="6062472" y="4169664"/>
-            <a:ext cx="685800" cy="384048"/>
+          <p:cNvPr id="54" name="Text 52"/>
+          <p:cNvSpPr/>
+          <p:nvPr/>
+        </p:nvSpPr>
+        <p:spPr>
+          <a:xfrm>
+            <a:off x="5218730" y="4169664"/>
+            <a:ext cx="603504" cy="384048"/>
           </a:xfrm>
           <a:prstGeom prst="rect">
             <a:avLst/>
@@ -35443,14 +35622,14 @@
       </p:sp>
       <p:sp>
         <p:nvSpPr>
-          <p:cNvPr id="52" name="Shape 50"/>
-          <p:cNvSpPr/>
-          <p:nvPr/>
-        </p:nvSpPr>
-        <p:spPr>
-          <a:xfrm>
-            <a:off x="6870192" y="4169664"/>
-            <a:ext cx="685800" cy="384048"/>
+          <p:cNvPr id="55" name="Shape 53"/>
+          <p:cNvSpPr/>
+          <p:nvPr/>
+        </p:nvSpPr>
+        <p:spPr>
+          <a:xfrm>
+            <a:off x="5872111" y="4169664"/>
+            <a:ext cx="603504" cy="384048"/>
           </a:xfrm>
           <a:prstGeom prst="rect">
             <a:avLst>
@@ -35470,14 +35649,14 @@
       </p:sp>
       <p:sp>
         <p:nvSpPr>
-          <p:cNvPr id="53" name="Text 51"/>
-          <p:cNvSpPr/>
-          <p:nvPr/>
-        </p:nvSpPr>
-        <p:spPr>
-          <a:xfrm>
-            <a:off x="6870192" y="4169664"/>
-            <a:ext cx="685800" cy="384048"/>
+          <p:cNvPr id="56" name="Text 54"/>
+          <p:cNvSpPr/>
+          <p:nvPr/>
+        </p:nvSpPr>
+        <p:spPr>
+          <a:xfrm>
+            <a:off x="5872111" y="4169664"/>
+            <a:ext cx="603504" cy="384048"/>
           </a:xfrm>
           <a:prstGeom prst="rect">
             <a:avLst/>
@@ -35501,7 +35680,7 @@
                 <a:ea typeface="Trebuchet MS" pitchFamily="34" charset="-122"/>
                 <a:cs typeface="Trebuchet MS" pitchFamily="34" charset="-120"/>
               </a:rPr>
-              <a:t>ll</a:t>
+              <a:t>l</a:t>
             </a:r>
             <a:endParaRPr lang="en-US" sz="900" dirty="0"/>
           </a:p>
@@ -35509,14 +35688,14 @@
       </p:sp>
       <p:sp>
         <p:nvSpPr>
-          <p:cNvPr id="54" name="Shape 52"/>
-          <p:cNvSpPr/>
-          <p:nvPr/>
-        </p:nvSpPr>
-        <p:spPr>
-          <a:xfrm>
-            <a:off x="7677912" y="4169664"/>
-            <a:ext cx="685800" cy="384048"/>
+          <p:cNvPr id="57" name="Shape 55"/>
+          <p:cNvSpPr/>
+          <p:nvPr/>
+        </p:nvSpPr>
+        <p:spPr>
+          <a:xfrm>
+            <a:off x="6525491" y="4169664"/>
+            <a:ext cx="603504" cy="384048"/>
           </a:xfrm>
           <a:prstGeom prst="rect">
             <a:avLst>
@@ -35536,14 +35715,146 @@
       </p:sp>
       <p:sp>
         <p:nvSpPr>
-          <p:cNvPr id="55" name="Text 53"/>
-          <p:cNvSpPr/>
-          <p:nvPr/>
-        </p:nvSpPr>
-        <p:spPr>
-          <a:xfrm>
-            <a:off x="7677912" y="4169664"/>
-            <a:ext cx="685800" cy="384048"/>
+          <p:cNvPr id="58" name="Text 56"/>
+          <p:cNvSpPr/>
+          <p:nvPr/>
+        </p:nvSpPr>
+        <p:spPr>
+          <a:xfrm>
+            <a:off x="6525491" y="4169664"/>
+            <a:ext cx="603504" cy="384048"/>
+          </a:xfrm>
+          <a:prstGeom prst="rect">
+            <a:avLst/>
+          </a:prstGeom>
+          <a:noFill/>
+          <a:ln/>
+        </p:spPr>
+        <p:txBody>
+          <a:bodyPr wrap="square" lIns="0" tIns="0" rIns="0" bIns="0" rtlCol="0" anchor="ctr"/>
+          <a:lstStyle/>
+          <a:p>
+            <a:pPr algn="ctr" indent="0" marL="0">
+              <a:buNone/>
+            </a:pPr>
+            <a:r>
+              <a:rPr lang="en-US" sz="900" b="1" dirty="0">
+                <a:solidFill>
+                  <a:srgbClr val="9D174D"/>
+                </a:solidFill>
+                <a:latin typeface="Trebuchet MS" pitchFamily="34" charset="0"/>
+                <a:ea typeface="Trebuchet MS" pitchFamily="34" charset="-122"/>
+                <a:cs typeface="Trebuchet MS" pitchFamily="34" charset="-120"/>
+              </a:rPr>
+              <a:t>i</a:t>
+            </a:r>
+            <a:endParaRPr lang="en-US" sz="900" dirty="0"/>
+          </a:p>
+        </p:txBody>
+      </p:sp>
+      <p:sp>
+        <p:nvSpPr>
+          <p:cNvPr id="59" name="Shape 57"/>
+          <p:cNvSpPr/>
+          <p:nvPr/>
+        </p:nvSpPr>
+        <p:spPr>
+          <a:xfrm>
+            <a:off x="7178871" y="4169664"/>
+            <a:ext cx="603504" cy="384048"/>
+          </a:xfrm>
+          <a:prstGeom prst="rect">
+            <a:avLst>
+              <a:gd name="adj" fmla="val 9524"/>
+            </a:avLst>
+          </a:prstGeom>
+          <a:solidFill>
+            <a:srgbClr val="FFFFFF"/>
+          </a:solidFill>
+          <a:ln w="12700">
+            <a:solidFill>
+              <a:srgbClr val="DB2777"/>
+            </a:solidFill>
+            <a:prstDash val="solid"/>
+          </a:ln>
+        </p:spPr>
+      </p:sp>
+      <p:sp>
+        <p:nvSpPr>
+          <p:cNvPr id="60" name="Text 58"/>
+          <p:cNvSpPr/>
+          <p:nvPr/>
+        </p:nvSpPr>
+        <p:spPr>
+          <a:xfrm>
+            <a:off x="7178871" y="4169664"/>
+            <a:ext cx="603504" cy="384048"/>
+          </a:xfrm>
+          <a:prstGeom prst="rect">
+            <a:avLst/>
+          </a:prstGeom>
+          <a:noFill/>
+          <a:ln/>
+        </p:spPr>
+        <p:txBody>
+          <a:bodyPr wrap="square" lIns="0" tIns="0" rIns="0" bIns="0" rtlCol="0" anchor="ctr"/>
+          <a:lstStyle/>
+          <a:p>
+            <a:pPr algn="ctr" indent="0" marL="0">
+              <a:buNone/>
+            </a:pPr>
+            <a:r>
+              <a:rPr lang="en-US" sz="900" b="1" dirty="0">
+                <a:solidFill>
+                  <a:srgbClr val="9D174D"/>
+                </a:solidFill>
+                <a:latin typeface="Trebuchet MS" pitchFamily="34" charset="0"/>
+                <a:ea typeface="Trebuchet MS" pitchFamily="34" charset="-122"/>
+                <a:cs typeface="Trebuchet MS" pitchFamily="34" charset="-120"/>
+              </a:rPr>
+              <a:t>t</a:t>
+            </a:r>
+            <a:endParaRPr lang="en-US" sz="900" dirty="0"/>
+          </a:p>
+        </p:txBody>
+      </p:sp>
+      <p:sp>
+        <p:nvSpPr>
+          <p:cNvPr id="61" name="Shape 59"/>
+          <p:cNvSpPr/>
+          <p:nvPr/>
+        </p:nvSpPr>
+        <p:spPr>
+          <a:xfrm>
+            <a:off x="7832252" y="4169664"/>
+            <a:ext cx="603504" cy="384048"/>
+          </a:xfrm>
+          <a:prstGeom prst="rect">
+            <a:avLst>
+              <a:gd name="adj" fmla="val 9524"/>
+            </a:avLst>
+          </a:prstGeom>
+          <a:solidFill>
+            <a:srgbClr val="FFFFFF"/>
+          </a:solidFill>
+          <a:ln w="12700">
+            <a:solidFill>
+              <a:srgbClr val="DB2777"/>
+            </a:solidFill>
+            <a:prstDash val="solid"/>
+          </a:ln>
+        </p:spPr>
+      </p:sp>
+      <p:sp>
+        <p:nvSpPr>
+          <p:cNvPr id="62" name="Text 60"/>
+          <p:cNvSpPr/>
+          <p:nvPr/>
+        </p:nvSpPr>
+        <p:spPr>
+          <a:xfrm>
+            <a:off x="7832252" y="4169664"/>
+            <a:ext cx="603504" cy="384048"/>
           </a:xfrm>
           <a:prstGeom prst="rect">
             <a:avLst/>
@@ -37521,7 +37832,7 @@
                 <a:ea typeface="Trebuchet MS" pitchFamily="34" charset="-122"/>
                 <a:cs typeface="Trebuchet MS" pitchFamily="34" charset="-120"/>
               </a:rPr>
-              <a:t>su-</a:t>
+              <a:t>un-</a:t>
             </a:r>
             <a:endParaRPr lang="en-US" sz="1300" dirty="0"/>
           </a:p>
@@ -37674,7 +37985,7 @@
                 <a:ea typeface="Trebuchet MS" pitchFamily="34" charset="-122"/>
                 <a:cs typeface="Trebuchet MS" pitchFamily="34" charset="-120"/>
               </a:rPr>
-              <a:t>over-</a:t>
+              <a:t>supra-</a:t>
             </a:r>
             <a:endParaRPr lang="en-US" sz="1300" dirty="0"/>
           </a:p>
@@ -37763,7 +38074,7 @@
                 <a:ea typeface="Trebuchet MS" pitchFamily="34" charset="-122"/>
                 <a:cs typeface="Trebuchet MS" pitchFamily="34" charset="-120"/>
               </a:rPr>
-              <a:t>-ly</a:t>
+              <a:t>-ism</a:t>
             </a:r>
             <a:endParaRPr lang="en-US" sz="1300" dirty="0"/>
           </a:p>
@@ -37916,7 +38227,7 @@
                 <a:ea typeface="Trebuchet MS" pitchFamily="34" charset="-122"/>
                 <a:cs typeface="Trebuchet MS" pitchFamily="34" charset="-120"/>
               </a:rPr>
-              <a:t>-ism</a:t>
+              <a:t>-ist</a:t>
             </a:r>
             <a:endParaRPr lang="en-US" sz="1300" dirty="0"/>
           </a:p>
@@ -37980,7 +38291,7 @@
                 <a:ea typeface="Trebuchet MS" pitchFamily="34" charset="-122"/>
                 <a:cs typeface="Trebuchet MS" pitchFamily="34" charset="-120"/>
               </a:rPr>
-              <a:t>semi-</a:t>
+              <a:t>ultra-</a:t>
             </a:r>
             <a:endParaRPr lang="en-US" sz="1300" dirty="0"/>
           </a:p>
@@ -38069,7 +38380,7 @@
                 <a:ea typeface="Trebuchet MS" pitchFamily="34" charset="-122"/>
                 <a:cs typeface="Trebuchet MS" pitchFamily="34" charset="-120"/>
               </a:rPr>
-              <a:t>-ist</a:t>
+              <a:t>-ly</a:t>
             </a:r>
             <a:endParaRPr lang="en-US" sz="1300" dirty="0"/>
           </a:p>
@@ -38504,7 +38815,7 @@
                 <a:ea typeface="Trebuchet MS" pitchFamily="34" charset="-122"/>
                 <a:cs typeface="Trebuchet MS" pitchFamily="34" charset="-120"/>
               </a:rPr>
-              <a:t>irrationality</a:t>
+              <a:t>rationalism</a:t>
             </a:r>
             <a:endParaRPr lang="en-US" sz="1200" dirty="0"/>
           </a:p>
@@ -38570,7 +38881,7 @@
                 <a:ea typeface="Trebuchet MS" pitchFamily="34" charset="-122"/>
                 <a:cs typeface="Trebuchet MS" pitchFamily="34" charset="-120"/>
               </a:rPr>
-              <a:t>rationalism</a:t>
+              <a:t>rationalist</a:t>
             </a:r>
             <a:endParaRPr lang="en-US" sz="1200" dirty="0"/>
           </a:p>
@@ -38636,7 +38947,7 @@
                 <a:ea typeface="Trebuchet MS" pitchFamily="34" charset="-122"/>
                 <a:cs typeface="Trebuchet MS" pitchFamily="34" charset="-120"/>
               </a:rPr>
-              <a:t>rationalist</a:t>
+              <a:t>irrationality</a:t>
             </a:r>
             <a:endParaRPr lang="en-US" sz="1200" dirty="0"/>
           </a:p>
@@ -39824,7 +40135,7 @@
                 <a:ea typeface="Calibri" pitchFamily="34" charset="-122"/>
                 <a:cs typeface="Calibri" pitchFamily="34" charset="-120"/>
               </a:rPr>
-              <a:t>1.  The root 'rational' comes from Latin and relates to reason or thinking.</a:t>
+              <a:t>1.  The root 'rational' comes from Latin and relates to reason or logic.</a:t>
             </a:r>
             <a:endParaRPr lang="en-US" sz="1300" dirty="0"/>
           </a:p>
@@ -39963,7 +40274,7 @@
                 <a:ea typeface="Calibri" pitchFamily="34" charset="-122"/>
                 <a:cs typeface="Calibri" pitchFamily="34" charset="-120"/>
               </a:rPr>
-              <a:t>2.  The word 'irrational' means the same thing as 'rational'.</a:t>
+              <a:t>2.  Adding the suffix '-ity' to 'rational' creates a noun meaning the quality of being rational.</a:t>
             </a:r>
             <a:endParaRPr lang="en-US" sz="1300" dirty="0"/>
           </a:p>
@@ -39986,11 +40297,11 @@
             </a:avLst>
           </a:prstGeom>
           <a:solidFill>
-            <a:srgbClr val="FEE2E2"/>
-          </a:solidFill>
-          <a:ln w="12700">
-            <a:solidFill>
-              <a:srgbClr val="DC2626"/>
+            <a:srgbClr val="DCFCE7"/>
+          </a:solidFill>
+          <a:ln w="12700">
+            <a:solidFill>
+              <a:srgbClr val="16A34A"/>
             </a:solidFill>
             <a:prstDash val="solid"/>
           </a:ln>
@@ -40023,13 +40334,13 @@
             <a:r>
               <a:rPr lang="en-US" sz="1100" b="1" dirty="0">
                 <a:solidFill>
-                  <a:srgbClr val="DC2626"/>
+                  <a:srgbClr val="16A34A"/>
                 </a:solidFill>
                 <a:latin typeface="Trebuchet MS" pitchFamily="34" charset="0"/>
                 <a:ea typeface="Trebuchet MS" pitchFamily="34" charset="-122"/>
                 <a:cs typeface="Trebuchet MS" pitchFamily="34" charset="-120"/>
               </a:rPr>
-              <a:t>FALSE</a:t>
+              <a:t>TRUE</a:t>
             </a:r>
             <a:endParaRPr lang="en-US" sz="1100" dirty="0"/>
           </a:p>
@@ -40102,7 +40413,7 @@
                 <a:ea typeface="Calibri" pitchFamily="34" charset="-122"/>
                 <a:cs typeface="Calibri" pitchFamily="34" charset="-120"/>
               </a:rPr>
-              <a:t>3.  Adding the prefix 'ir' to 'rational' creates a word meaning not based on reason.</a:t>
+              <a:t>3.  The word 'irrational' means behaving in a very sensible and logical way.</a:t>
             </a:r>
             <a:endParaRPr lang="en-US" sz="1300" dirty="0"/>
           </a:p>
@@ -40125,11 +40436,11 @@
             </a:avLst>
           </a:prstGeom>
           <a:solidFill>
-            <a:srgbClr val="DCFCE7"/>
-          </a:solidFill>
-          <a:ln w="12700">
-            <a:solidFill>
-              <a:srgbClr val="16A34A"/>
+            <a:srgbClr val="FEE2E2"/>
+          </a:solidFill>
+          <a:ln w="12700">
+            <a:solidFill>
+              <a:srgbClr val="DC2626"/>
             </a:solidFill>
             <a:prstDash val="solid"/>
           </a:ln>
@@ -40162,13 +40473,13 @@
             <a:r>
               <a:rPr lang="en-US" sz="1100" b="1" dirty="0">
                 <a:solidFill>
-                  <a:srgbClr val="16A34A"/>
+                  <a:srgbClr val="DC2626"/>
                 </a:solidFill>
                 <a:latin typeface="Trebuchet MS" pitchFamily="34" charset="0"/>
                 <a:ea typeface="Trebuchet MS" pitchFamily="34" charset="-122"/>
                 <a:cs typeface="Trebuchet MS" pitchFamily="34" charset="-120"/>
               </a:rPr>
-              <a:t>TRUE</a:t>
+              <a:t>FALSE</a:t>
             </a:r>
             <a:endParaRPr lang="en-US" sz="1100" dirty="0"/>
           </a:p>
@@ -40241,7 +40552,7 @@
                 <a:ea typeface="Calibri" pitchFamily="34" charset="-122"/>
                 <a:cs typeface="Calibri" pitchFamily="34" charset="-120"/>
               </a:rPr>
-              <a:t>4.  A rationalist is someone who values clear thinking and logic when making decisions.</a:t>
+              <a:t>4.  A rationalist is someone who values reason and logic when seeking knowledge.</a:t>
             </a:r>
             <a:endParaRPr lang="en-US" sz="1300" dirty="0"/>
           </a:p>
@@ -40380,7 +40691,7 @@
                 <a:ea typeface="Calibri" pitchFamily="34" charset="-122"/>
                 <a:cs typeface="Calibri" pitchFamily="34" charset="-120"/>
               </a:rPr>
-              <a:t>5.  The suffix '-ly' in 'rationally' turns the word into a noun.</a:t>
+              <a:t>5.  The prefix 'ir-' in 'irrational' means 'more than' or 'above'.</a:t>
             </a:r>
             <a:endParaRPr lang="en-US" sz="1300" dirty="0"/>
           </a:p>
@@ -41349,7 +41660,7 @@
                 <a:ea typeface="Trebuchet MS" pitchFamily="34" charset="-122"/>
                 <a:cs typeface="Trebuchet MS" pitchFamily="34" charset="-120"/>
               </a:rPr>
-              <a:t>irrationality</a:t>
+              <a:t>rationalism</a:t>
             </a:r>
             <a:endParaRPr lang="en-US" sz="1300" dirty="0"/>
           </a:p>
@@ -41415,7 +41726,7 @@
                 <a:ea typeface="Trebuchet MS" pitchFamily="34" charset="-122"/>
                 <a:cs typeface="Trebuchet MS" pitchFamily="34" charset="-120"/>
               </a:rPr>
-              <a:t>rationalism</a:t>
+              <a:t>rationalist</a:t>
             </a:r>
             <a:endParaRPr lang="en-US" sz="1300" dirty="0"/>
           </a:p>
@@ -42200,7 +42511,7 @@
                 <a:ea typeface="Trebuchet MS" pitchFamily="34" charset="-122"/>
                 <a:cs typeface="Trebuchet MS" pitchFamily="34" charset="-120"/>
               </a:rPr>
-              <a:t>su-</a:t>
+              <a:t>un-</a:t>
             </a:r>
             <a:endParaRPr lang="en-US" sz="1300" dirty="0"/>
           </a:p>
@@ -42353,7 +42664,7 @@
                 <a:ea typeface="Trebuchet MS" pitchFamily="34" charset="-122"/>
                 <a:cs typeface="Trebuchet MS" pitchFamily="34" charset="-120"/>
               </a:rPr>
-              <a:t>over-</a:t>
+              <a:t>supra-</a:t>
             </a:r>
             <a:endParaRPr lang="en-US" sz="1300" dirty="0"/>
           </a:p>
@@ -42442,7 +42753,7 @@
                 <a:ea typeface="Trebuchet MS" pitchFamily="34" charset="-122"/>
                 <a:cs typeface="Trebuchet MS" pitchFamily="34" charset="-120"/>
               </a:rPr>
-              <a:t>-ly</a:t>
+              <a:t>-ism</a:t>
             </a:r>
             <a:endParaRPr lang="en-US" sz="1300" dirty="0"/>
           </a:p>
@@ -42595,7 +42906,7 @@
                 <a:ea typeface="Trebuchet MS" pitchFamily="34" charset="-122"/>
                 <a:cs typeface="Trebuchet MS" pitchFamily="34" charset="-120"/>
               </a:rPr>
-              <a:t>-ism</a:t>
+              <a:t>-ist</a:t>
             </a:r>
             <a:endParaRPr lang="en-US" sz="1300" dirty="0"/>
           </a:p>
@@ -42659,7 +42970,7 @@
                 <a:ea typeface="Trebuchet MS" pitchFamily="34" charset="-122"/>
                 <a:cs typeface="Trebuchet MS" pitchFamily="34" charset="-120"/>
               </a:rPr>
-              <a:t>semi-</a:t>
+              <a:t>ultra-</a:t>
             </a:r>
             <a:endParaRPr lang="en-US" sz="1300" dirty="0"/>
           </a:p>
@@ -42748,7 +43059,7 @@
                 <a:ea typeface="Trebuchet MS" pitchFamily="34" charset="-122"/>
                 <a:cs typeface="Trebuchet MS" pitchFamily="34" charset="-120"/>
               </a:rPr>
-              <a:t>-ist</a:t>
+              <a:t>-ly</a:t>
             </a:r>
             <a:endParaRPr lang="en-US" sz="1300" dirty="0"/>
           </a:p>
@@ -43798,7 +44109,7 @@
                 <a:ea typeface="Calibri" pitchFamily="34" charset="-122"/>
                 <a:cs typeface="Calibri" pitchFamily="34" charset="-120"/>
               </a:rPr>
-              <a:t>The quality of thinking clearly and making sensible decisions based on facts and logic.</a:t>
+              <a:t>The quality of being able to think clearly and make sensible decisions.</a:t>
             </a:r>
             <a:endParaRPr lang="en-US" sz="1200" dirty="0"/>
           </a:p>
@@ -43937,7 +44248,7 @@
                 <a:ea typeface="Calibri" pitchFamily="34" charset="-122"/>
                 <a:cs typeface="Calibri" pitchFamily="34" charset="-120"/>
               </a:rPr>
-              <a:t>To come up with reasons to explain why you did something, or to make a system more efficient.</a:t>
+              <a:t>To explain or justify something using reasons, even if they are not the real ones.</a:t>
             </a:r>
             <a:endParaRPr lang="en-US" sz="1200" dirty="0"/>
           </a:p>
@@ -44076,7 +44387,7 @@
                 <a:ea typeface="Calibri" pitchFamily="34" charset="-122"/>
                 <a:cs typeface="Calibri" pitchFamily="34" charset="-120"/>
               </a:rPr>
-              <a:t>The belief that reason and logic are the best ways to find truth and make decisions.</a:t>
+              <a:t>A person who believes that reason and logic are the most important guides to truth.</a:t>
             </a:r>
             <a:endParaRPr lang="en-US" sz="1200" dirty="0"/>
           </a:p>
@@ -44215,7 +44526,7 @@
                 <a:ea typeface="Calibri" pitchFamily="34" charset="-122"/>
                 <a:cs typeface="Calibri" pitchFamily="34" charset="-120"/>
               </a:rPr>
-              <a:t>Making decisions based on clear thinking and good reasons, not just feelings.</a:t>
+              <a:t>Making decisions based on clear thinking and good reasons.</a:t>
             </a:r>
             <a:endParaRPr lang="en-US" sz="1200" dirty="0"/>
           </a:p>
@@ -44288,7 +44599,7 @@
                 <a:ea typeface="Trebuchet MS" pitchFamily="34" charset="-122"/>
                 <a:cs typeface="Trebuchet MS" pitchFamily="34" charset="-120"/>
               </a:rPr>
-              <a:t>irrationality</a:t>
+              <a:t>rationalism</a:t>
             </a:r>
             <a:endParaRPr lang="en-US" sz="1200" dirty="0"/>
           </a:p>
@@ -44354,7 +44665,7 @@
                 <a:ea typeface="Calibri" pitchFamily="34" charset="-122"/>
                 <a:cs typeface="Calibri" pitchFamily="34" charset="-120"/>
               </a:rPr>
-              <a:t>The quality of not thinking clearly or making decisions that don't make logical sense.</a:t>
+              <a:t>The belief that knowledge comes mostly from reason and logic rather than feelings or religion.</a:t>
             </a:r>
             <a:endParaRPr lang="en-US" sz="1200" dirty="0"/>
           </a:p>
@@ -44427,7 +44738,7 @@
                 <a:ea typeface="Trebuchet MS" pitchFamily="34" charset="-122"/>
                 <a:cs typeface="Trebuchet MS" pitchFamily="34" charset="-120"/>
               </a:rPr>
-              <a:t>rationalism</a:t>
+              <a:t>rationalist</a:t>
             </a:r>
             <a:endParaRPr lang="en-US" sz="1200" dirty="0"/>
           </a:p>
@@ -44493,7 +44804,7 @@
                 <a:ea typeface="Calibri" pitchFamily="34" charset="-122"/>
                 <a:cs typeface="Calibri" pitchFamily="34" charset="-120"/>
               </a:rPr>
-              <a:t>Not based on clear thinking or good reasons; something that doesn't make logical sense.</a:t>
+              <a:t>Not based on clear thinking; making no logical sense.</a:t>
             </a:r>
             <a:endParaRPr lang="en-US" sz="1200" dirty="0"/>
           </a:p>
@@ -44988,7 +45299,7 @@
                 <a:ea typeface="Calibri" pitchFamily="34" charset="-122"/>
                 <a:cs typeface="Calibri" pitchFamily="34" charset="-120"/>
               </a:rPr>
-              <a:t>The scientist gave a rational explanation for why the experiment produced such surprising results.</a:t>
+              <a:t>The scientist tried to be rational when looking at the evidence, even though the results were surprising.</a:t>
             </a:r>
             <a:endParaRPr lang="en-US" sz="1500" dirty="0"/>
           </a:p>
@@ -45152,7 +45463,7 @@
                 <a:ea typeface="Calibri" pitchFamily="34" charset="-122"/>
                 <a:cs typeface="Calibri" pitchFamily="34" charset="-120"/>
               </a:rPr>
-              <a:t>It is important to think rationally when solving a tricky maths problem, rather than just guessing.</a:t>
+              <a:t>It is hard to think rationally when you are feeling very upset or scared.</a:t>
             </a:r>
             <a:endParaRPr lang="en-US" sz="1500" dirty="0"/>
           </a:p>
@@ -45316,7 +45627,7 @@
                 <a:ea typeface="Calibri" pitchFamily="34" charset="-122"/>
                 <a:cs typeface="Calibri" pitchFamily="34" charset="-120"/>
               </a:rPr>
-              <a:t>The teacher asked the students to rationalise their choices and explain the reasons behind their decisions.</a:t>
+              <a:t>The teacher asked the students to rationalise their answer by explaining the steps they used to solve the problem.</a:t>
             </a:r>
             <a:endParaRPr lang="en-US" sz="1500" dirty="0"/>
           </a:p>
